--- a/presentations/12-kids-first-blocks/12-kids-first-blocks-lecture.pptx
+++ b/presentations/12-kids-first-blocks/12-kids-first-blocks-lecture.pptx
@@ -138,7 +138,7 @@
   <p:extLst>
     <p:ext uri="{521415D9-36F7-43E2-AB2F-B90AF26B5E84}">
       <p14:sectionLst xmlns:p14="http://schemas.microsoft.com/office/powerpoint/2010/main">
-        <p14:section name="Opening" id="{9be86e13-8b31-373e-5ade-7a408d61492e}">
+        <p14:section name="Opening" id="{30084666-0a2a-8baf-eb6f-2911c50c8c46}">
           <p14:sldIdLst>
             <p14:sldId id="256"/>
             <p14:sldId id="257"/>
@@ -146,14 +146,14 @@
             <p14:sldId id="259"/>
           </p14:sldIdLst>
         </p14:section>
-        <p14:section name="The Robot game" id="{9dcabb06-9808-b9b8-f23e-d5956e8f520e}">
+        <p14:section name="The Robot game" id="{3069ef9f-739e-0725-f464-2a5d17febadf}">
           <p14:sldIdLst>
             <p14:sldId id="260"/>
             <p14:sldId id="261"/>
             <p14:sldId id="262"/>
           </p14:sldIdLst>
         </p14:section>
-        <p14:section name="What is a program?" id="{72968a85-3aef-559a-f76a-73e9b819589b}">
+        <p14:section name="What is a program?" id="{3171df06-0279-ae71-ea17-39c929eb4bc3}">
           <p14:sldIdLst>
             <p14:sldId id="263"/>
             <p14:sldId id="264"/>
@@ -163,7 +163,7 @@
             <p14:sldId id="268"/>
           </p14:sldIdLst>
         </p14:section>
-        <p14:section name="The screen is a grid" id="{4c4596cf-e31a-ae75-a840-cc8c0402309d}">
+        <p14:section name="The screen is a grid" id="{1132ef3f-04db-b345-100d-c4fc9bd8b023}">
           <p14:sldIdLst>
             <p14:sldId id="269"/>
             <p14:sldId id="270"/>
@@ -173,7 +173,7 @@
             <p14:sldId id="274"/>
           </p14:sldIdLst>
         </p14:section>
-        <p14:section name="Three big blocks" id="{4b5a62e9-0736-3837-dc5d-78dec0cc94b3}">
+        <p14:section name="Three big blocks" id="{f3961ad1-a9cc-2631-f641-a857f7a97689}">
           <p14:sldIdLst>
             <p14:sldId id="275"/>
             <p14:sldId id="276"/>
@@ -182,7 +182,7 @@
             <p14:sldId id="279"/>
           </p14:sldIdLst>
         </p14:section>
-        <p14:section name="Boxes with names" id="{627ad5a8-d876-b4c3-074c-78e73ca89e3c}">
+        <p14:section name="Boxes with names" id="{f08af637-4316-4fbf-4146-96b2c8f882e6}">
           <p14:sldIdLst>
             <p14:sldId id="280"/>
             <p14:sldId id="281"/>
@@ -193,7 +193,7 @@
             <p14:sldId id="286"/>
           </p14:sldIdLst>
         </p14:section>
-        <p14:section name="Closing" id="{e8b6e3a2-65ed-27c4-8fe4-003ae1ba8b0d}">
+        <p14:section name="Closing" id="{a477185f-406f-080f-8b56-6117a077ce92}">
           <p14:sldIdLst>
             <p14:sldId id="287"/>
           </p14:sldIdLst>

--- a/presentations/12-kids-first-blocks/12-kids-first-blocks-lecture.pptx
+++ b/presentations/12-kids-first-blocks/12-kids-first-blocks-lecture.pptx
@@ -138,7 +138,7 @@
   <p:extLst>
     <p:ext uri="{521415D9-36F7-43E2-AB2F-B90AF26B5E84}">
       <p14:sectionLst xmlns:p14="http://schemas.microsoft.com/office/powerpoint/2010/main">
-        <p14:section name="Opening" id="{30084666-0a2a-8baf-eb6f-2911c50c8c46}">
+        <p14:section name="Opening" id="{f7356845-10d7-af6d-3799-59f7c115f10c}">
           <p14:sldIdLst>
             <p14:sldId id="256"/>
             <p14:sldId id="257"/>
@@ -146,14 +146,14 @@
             <p14:sldId id="259"/>
           </p14:sldIdLst>
         </p14:section>
-        <p14:section name="The Robot game" id="{3069ef9f-739e-0725-f464-2a5d17febadf}">
+        <p14:section name="The Robot game" id="{64b1cb25-a21c-7542-e327-a0b4e233e12e}">
           <p14:sldIdLst>
             <p14:sldId id="260"/>
             <p14:sldId id="261"/>
             <p14:sldId id="262"/>
           </p14:sldIdLst>
         </p14:section>
-        <p14:section name="What is a program?" id="{3171df06-0279-ae71-ea17-39c929eb4bc3}">
+        <p14:section name="What is a program?" id="{6a622685-94ce-6991-3487-2d4a4c5baa6d}">
           <p14:sldIdLst>
             <p14:sldId id="263"/>
             <p14:sldId id="264"/>
@@ -163,7 +163,7 @@
             <p14:sldId id="268"/>
           </p14:sldIdLst>
         </p14:section>
-        <p14:section name="The screen is a grid" id="{1132ef3f-04db-b345-100d-c4fc9bd8b023}">
+        <p14:section name="The screen is a grid" id="{5ed5e40e-8a1a-6388-8ee0-fafe54dbb439}">
           <p14:sldIdLst>
             <p14:sldId id="269"/>
             <p14:sldId id="270"/>
@@ -173,7 +173,7 @@
             <p14:sldId id="274"/>
           </p14:sldIdLst>
         </p14:section>
-        <p14:section name="Three big blocks" id="{f3961ad1-a9cc-2631-f641-a857f7a97689}">
+        <p14:section name="Three big blocks" id="{94865220-ca9b-5c71-96dc-ffe4aac737fa}">
           <p14:sldIdLst>
             <p14:sldId id="275"/>
             <p14:sldId id="276"/>
@@ -182,7 +182,7 @@
             <p14:sldId id="279"/>
           </p14:sldIdLst>
         </p14:section>
-        <p14:section name="Boxes with names" id="{f08af637-4316-4fbf-4146-96b2c8f882e6}">
+        <p14:section name="Boxes with names" id="{9e292ef1-9232-26bc-c006-f9a00ded1d8c}">
           <p14:sldIdLst>
             <p14:sldId id="280"/>
             <p14:sldId id="281"/>
@@ -193,7 +193,7 @@
             <p14:sldId id="286"/>
           </p14:sldIdLst>
         </p14:section>
-        <p14:section name="Closing" id="{a477185f-406f-080f-8b56-6117a077ce92}">
+        <p14:section name="Closing" id="{d4055b6f-70de-8370-4af6-35d91f3e6d8f}">
           <p14:sldIdLst>
             <p14:sldId id="287"/>
           </p14:sldIdLst>
@@ -9873,7 +9873,7 @@
           </a:ln>
         </p:spPr>
         <p:txBody>
-          <a:bodyPr wrap="square" lIns="0" tIns="127000" rIns="101600" bIns="0" rtlCol="0" anchor="ctr"/>
+          <a:bodyPr wrap="square" lIns="88900" tIns="88900" rIns="88900" bIns="88900" rtlCol="0" anchor="ctr"/>
           <a:lstStyle/>
           <a:p>
             <a:pPr algn="l" indent="0" marL="0">
@@ -9920,7 +9920,7 @@
           </a:ln>
         </p:spPr>
         <p:txBody>
-          <a:bodyPr wrap="square" lIns="0" tIns="127000" rIns="101600" bIns="0" rtlCol="0" anchor="ctr"/>
+          <a:bodyPr wrap="square" lIns="88900" tIns="88900" rIns="88900" bIns="88900" rtlCol="0" anchor="ctr"/>
           <a:lstStyle/>
           <a:p>
             <a:pPr algn="l" indent="0" marL="0">
@@ -9967,7 +9967,7 @@
           </a:ln>
         </p:spPr>
         <p:txBody>
-          <a:bodyPr wrap="square" lIns="0" tIns="127000" rIns="101600" bIns="0" rtlCol="0" anchor="ctr"/>
+          <a:bodyPr wrap="square" lIns="88900" tIns="88900" rIns="88900" bIns="88900" rtlCol="0" anchor="ctr"/>
           <a:lstStyle/>
           <a:p>
             <a:pPr algn="l" indent="0" marL="0">
@@ -13041,7 +13041,7 @@
           </a:ln>
         </p:spPr>
         <p:txBody>
-          <a:bodyPr wrap="square" lIns="0" tIns="127000" rIns="101600" bIns="0" rtlCol="0" anchor="ctr"/>
+          <a:bodyPr wrap="square" lIns="88900" tIns="88900" rIns="88900" bIns="88900" rtlCol="0" anchor="ctr"/>
           <a:lstStyle/>
           <a:p>
             <a:pPr algn="l" indent="0" marL="0">
@@ -13088,7 +13088,7 @@
           </a:ln>
         </p:spPr>
         <p:txBody>
-          <a:bodyPr wrap="square" lIns="0" tIns="127000" rIns="101600" bIns="0" rtlCol="0" anchor="ctr"/>
+          <a:bodyPr wrap="square" lIns="88900" tIns="88900" rIns="88900" bIns="88900" rtlCol="0" anchor="ctr"/>
           <a:lstStyle/>
           <a:p>
             <a:pPr algn="l" indent="0" marL="0">
@@ -13135,7 +13135,7 @@
           </a:ln>
         </p:spPr>
         <p:txBody>
-          <a:bodyPr wrap="square" lIns="0" tIns="127000" rIns="101600" bIns="0" rtlCol="0" anchor="ctr"/>
+          <a:bodyPr wrap="square" lIns="88900" tIns="88900" rIns="88900" bIns="88900" rtlCol="0" anchor="ctr"/>
           <a:lstStyle/>
           <a:p>
             <a:pPr algn="l" indent="0" marL="0">
@@ -13667,7 +13667,7 @@
           </a:ln>
         </p:spPr>
         <p:txBody>
-          <a:bodyPr wrap="square" lIns="0" tIns="127000" rIns="101600" bIns="0" rtlCol="0" anchor="ctr"/>
+          <a:bodyPr wrap="square" lIns="88900" tIns="88900" rIns="88900" bIns="88900" rtlCol="0" anchor="ctr"/>
           <a:lstStyle/>
           <a:p>
             <a:pPr algn="l" indent="0" marL="0">
@@ -13714,7 +13714,7 @@
           </a:ln>
         </p:spPr>
         <p:txBody>
-          <a:bodyPr wrap="square" lIns="0" tIns="127000" rIns="101600" bIns="0" rtlCol="0" anchor="ctr"/>
+          <a:bodyPr wrap="square" lIns="88900" tIns="88900" rIns="88900" bIns="88900" rtlCol="0" anchor="ctr"/>
           <a:lstStyle/>
           <a:p>
             <a:pPr algn="l" indent="0" marL="0">
@@ -13761,7 +13761,7 @@
           </a:ln>
         </p:spPr>
         <p:txBody>
-          <a:bodyPr wrap="square" lIns="0" tIns="127000" rIns="101600" bIns="0" rtlCol="0" anchor="ctr"/>
+          <a:bodyPr wrap="square" lIns="88900" tIns="88900" rIns="88900" bIns="88900" rtlCol="0" anchor="ctr"/>
           <a:lstStyle/>
           <a:p>
             <a:pPr algn="l" indent="0" marL="0">
